--- a/cursos/recursos/estrategia-en-el-final/06-mayorias-y-el-pasado-exterior.pptx
+++ b/cursos/recursos/estrategia-en-el-final/06-mayorias-y-el-pasado-exterior.pptx
@@ -4452,7 +4452,7 @@
                 </a:solidFill>
                 <a:latin typeface="Cambria"/>
               </a:rPr>
-              <a:t>Arma la posición de mayoría clásica (peones blancos en a2, b2, c2; negros en a7, b7) y convertila en un peón pasado contra el motor, tres veces seguidas, sin perder ninguno.</a:t>
+              <a:t>Arma la posición de mayoría clásica (peones blancos en a2, b2, c2; negros en a7, b7) y conviértela en un peón pasado contra el motor, tres veces seguidas, sin perder ninguno.</a:t>
             </a:r>
           </a:p>
         </p:txBody>
